--- a/assets/connpass-eyecatch/P028_eyecatch_temp.pptx
+++ b/assets/connpass-eyecatch/P028_eyecatch_temp.pptx
@@ -8857,7 +8857,29 @@
                 <a:ea typeface="Noto Sans JP" pitchFamily="34" charset="-122"/>
                 <a:cs typeface="Noto Sans JP" pitchFamily="34" charset="-120"/>
               </a:rPr>
-              <a:t>PA45　【カード×Copilot編】</a:t>
+              <a:t>PA45　【カード×</a:t>
+            </a:r>
+            <a:r>
+              <a:rPr lang="en-US" sz="4000" b="1" kern="0" spc="-112">
+                <a:solidFill>
+                  <a:srgbClr val="7C3AED"/>
+                </a:solidFill>
+                <a:latin typeface="Noto Sans JP" pitchFamily="34" charset="0"/>
+                <a:ea typeface="Noto Sans JP" pitchFamily="34" charset="-122"/>
+                <a:cs typeface="Noto Sans JP" pitchFamily="34" charset="-120"/>
+              </a:rPr>
+              <a:t>Copilot</a:t>
+            </a:r>
+            <a:r>
+              <a:rPr lang="en-US" sz="4000" b="1" kern="0" spc="-112">
+                <a:solidFill>
+                  <a:srgbClr val="0078D4"/>
+                </a:solidFill>
+                <a:latin typeface="Noto Sans JP" pitchFamily="34" charset="0"/>
+                <a:ea typeface="Noto Sans JP" pitchFamily="34" charset="-122"/>
+                <a:cs typeface="Noto Sans JP" pitchFamily="34" charset="-120"/>
+              </a:rPr>
+              <a:t>編】</a:t>
             </a:r>
             <a:endParaRPr lang="en-US" sz="3200" dirty="0"/>
           </a:p>
@@ -8896,7 +8918,29 @@
                 <a:ea typeface="Noto Sans JP" pitchFamily="34" charset="-122"/>
                 <a:cs typeface="Noto Sans JP" pitchFamily="34" charset="-120"/>
               </a:rPr>
-              <a:t>第28回：カードでまとめて片づける</a:t>
+              <a:t>第28回：</a:t>
+            </a:r>
+            <a:r>
+              <a:rPr lang="en-US" sz="4500" b="1" dirty="0">
+                <a:solidFill>
+                  <a:srgbClr val="7C3AED"/>
+                </a:solidFill>
+                <a:latin typeface="Noto Sans JP" pitchFamily="34" charset="0"/>
+                <a:ea typeface="Noto Sans JP" pitchFamily="34" charset="-122"/>
+                <a:cs typeface="Noto Sans JP" pitchFamily="34" charset="-120"/>
+              </a:rPr>
+              <a:t>Copilot</a:t>
+            </a:r>
+            <a:r>
+              <a:rPr lang="en-US" sz="4500" b="1" dirty="0">
+                <a:solidFill>
+                  <a:srgbClr val="1F2937"/>
+                </a:solidFill>
+                <a:latin typeface="Noto Sans JP" pitchFamily="34" charset="0"/>
+                <a:ea typeface="Noto Sans JP" pitchFamily="34" charset="-122"/>
+                <a:cs typeface="Noto Sans JP" pitchFamily="34" charset="-120"/>
+              </a:rPr>
+              <a:t>に書かせたカード</a:t>
             </a:r>
           </a:p>
           <a:p>
@@ -8912,29 +8956,7 @@
                 <a:ea typeface="Noto Sans JP" pitchFamily="34" charset="-122"/>
                 <a:cs typeface="Noto Sans JP" pitchFamily="34" charset="-120"/>
               </a:rPr>
-              <a:t>JSONは</a:t>
-            </a:r>
-            <a:r>
-              <a:rPr lang="en-US" sz="4500" b="1">
-                <a:solidFill>
-                  <a:srgbClr val="7C3AED"/>
-                </a:solidFill>
-                <a:latin typeface="Noto Sans JP" pitchFamily="34" charset="0"/>
-                <a:ea typeface="Noto Sans JP" pitchFamily="34" charset="-122"/>
-                <a:cs typeface="Noto Sans JP" pitchFamily="34" charset="-120"/>
-              </a:rPr>
-              <a:t>Copilot</a:t>
-            </a:r>
-            <a:r>
-              <a:rPr lang="en-US" sz="4500" b="1">
-                <a:solidFill>
-                  <a:srgbClr val="1F2937"/>
-                </a:solidFill>
-                <a:latin typeface="Noto Sans JP" pitchFamily="34" charset="0"/>
-                <a:ea typeface="Noto Sans JP" pitchFamily="34" charset="-122"/>
-                <a:cs typeface="Noto Sans JP" pitchFamily="34" charset="-120"/>
-              </a:rPr>
-              <a:t>に書かせる</a:t>
+              <a:t>やること3件をまとめて完了</a:t>
             </a:r>
           </a:p>
           <a:p>
@@ -8950,7 +8972,7 @@
                 <a:ea typeface="Noto Sans JP" pitchFamily="34" charset="-122"/>
                 <a:cs typeface="Noto Sans JP" pitchFamily="34" charset="-120"/>
               </a:rPr>
-              <a:t>チェックした分だけ完了に</a:t>
+              <a:t>JSONも式も手で書かない</a:t>
             </a:r>
             <a:endParaRPr lang="en-US" sz="4500" dirty="0"/>
           </a:p>
@@ -9023,7 +9045,7 @@
                 <a:ea typeface="Noto Sans JP" pitchFamily="34" charset="-122"/>
                 <a:cs typeface="Noto Sans JP" pitchFamily="34" charset="-120"/>
               </a:rPr>
-              <a:t>Theme　1枚のカードに3件並べ、チェックしたものだけまとめて更新する</a:t>
+              <a:t>Theme　カードのJSONも式もCopilotに書かせ、チェックした分だけ完了にする</a:t>
             </a:r>
             <a:endParaRPr lang="en-US" dirty="0"/>
           </a:p>

--- a/assets/connpass-eyecatch/P028_eyecatch_temp.pptx
+++ b/assets/connpass-eyecatch/P028_eyecatch_temp.pptx
@@ -8940,7 +8940,7 @@
                 <a:ea typeface="Noto Sans JP" pitchFamily="34" charset="-122"/>
                 <a:cs typeface="Noto Sans JP" pitchFamily="34" charset="-120"/>
               </a:rPr>
-              <a:t>に書かせたカード</a:t>
+              <a:t>に聞きながら</a:t>
             </a:r>
           </a:p>
           <a:p>
@@ -8972,7 +8972,29 @@
                 <a:ea typeface="Noto Sans JP" pitchFamily="34" charset="-122"/>
                 <a:cs typeface="Noto Sans JP" pitchFamily="34" charset="-120"/>
               </a:rPr>
-              <a:t>JSONも式も手で書かない</a:t>
+              <a:t>JSONと式は</a:t>
+            </a:r>
+            <a:r>
+              <a:rPr lang="en-US" sz="4500" b="1">
+                <a:solidFill>
+                  <a:srgbClr val="7C3AED"/>
+                </a:solidFill>
+                <a:latin typeface="Noto Sans JP" pitchFamily="34" charset="0"/>
+                <a:ea typeface="Noto Sans JP" pitchFamily="34" charset="-122"/>
+                <a:cs typeface="Noto Sans JP" pitchFamily="34" charset="-120"/>
+              </a:rPr>
+              <a:t>Copilot</a:t>
+            </a:r>
+            <a:r>
+              <a:rPr lang="en-US" sz="4500" b="1">
+                <a:solidFill>
+                  <a:srgbClr val="1F2937"/>
+                </a:solidFill>
+                <a:latin typeface="Noto Sans JP" pitchFamily="34" charset="0"/>
+                <a:ea typeface="Noto Sans JP" pitchFamily="34" charset="-122"/>
+                <a:cs typeface="Noto Sans JP" pitchFamily="34" charset="-120"/>
+              </a:rPr>
+              <a:t>に</a:t>
             </a:r>
             <a:endParaRPr lang="en-US" sz="4500" dirty="0"/>
           </a:p>
@@ -9045,7 +9067,7 @@
                 <a:ea typeface="Noto Sans JP" pitchFamily="34" charset="-122"/>
                 <a:cs typeface="Noto Sans JP" pitchFamily="34" charset="-120"/>
               </a:rPr>
-              <a:t>Theme　カードのJSONも式もCopilotに書かせ、チェックした分だけ完了にする</a:t>
+              <a:t>Theme　手が止まるJSONと式はCopilotに聞いて、チェックした分だけ完了にする</a:t>
             </a:r>
             <a:endParaRPr lang="en-US" dirty="0"/>
           </a:p>
